--- a/sessions_in_Abu_Dhabi/session_final.pptx
+++ b/sessions_in_Abu_Dhabi/session_final.pptx
@@ -5334,8 +5334,8 @@
         </p:blipFill>
         <p:spPr bwMode="auto">
           <a:xfrm>
-            <a:off x="4648200" y="1752600"/>
-            <a:ext cx="4038600" cy="2286000"/>
+            <a:off x="4648200" y="1765300"/>
+            <a:ext cx="4038600" cy="2247900"/>
           </a:xfrm>
           <a:prstGeom prst="rect">
             <a:avLst/>
@@ -11424,7 +11424,7 @@
             </a:r>
             <a:r>
               <a:rPr/>
-              <a:t>: Reduce expenditures by at least $10,000</a:t>
+              <a:t>: Reduce expenditures by at least 1,000 AED</a:t>
             </a:r>
           </a:p>
           <a:p>
@@ -12161,7 +12161,7 @@
                       </a:pPr>
                       <a:r>
                         <a:rPr/>
-                        <a:t>-10,140</a:t>
+                        <a:t>-1,014</a:t>
                       </a:r>
                     </a:p>
                   </a:txBody>
@@ -12176,7 +12176,7 @@
                       </a:pPr>
                       <a:r>
                         <a:rPr/>
-                        <a:t>[-10,922, -9,358]</a:t>
+                        <a:t>[-1,092, -935]</a:t>
                       </a:r>
                     </a:p>
                   </a:txBody>
@@ -12238,7 +12238,7 @@
                       </a:pPr>
                       <a:r>
                         <a:rPr/>
-                        <a:t>-9,829</a:t>
+                        <a:t>-982</a:t>
                       </a:r>
                     </a:p>
                   </a:txBody>
@@ -12253,7 +12253,7 @@
                       </a:pPr>
                       <a:r>
                         <a:rPr/>
-                        <a:t>[-11,684, -7,973]</a:t>
+                        <a:t>[-1,168, -797]</a:t>
                       </a:r>
                     </a:p>
                   </a:txBody>
@@ -12315,7 +12315,7 @@
                       </a:pPr>
                       <a:r>
                         <a:rPr/>
-                        <a:t>-9,051</a:t>
+                        <a:t>-905</a:t>
                       </a:r>
                     </a:p>
                   </a:txBody>
@@ -12330,7 +12330,7 @@
                       </a:pPr>
                       <a:r>
                         <a:rPr/>
-                        <a:t>[-9,921, -8,181]</a:t>
+                        <a:t>[-992, -818]</a:t>
                       </a:r>
                     </a:p>
                   </a:txBody>
@@ -12392,7 +12392,7 @@
                       </a:pPr>
                       <a:r>
                         <a:rPr/>
-                        <a:t>-8,163</a:t>
+                        <a:t>-816</a:t>
                       </a:r>
                     </a:p>
                   </a:txBody>
@@ -12407,7 +12407,7 @@
                       </a:pPr>
                       <a:r>
                         <a:rPr/>
-                        <a:t>[-8,792, -7,534]</a:t>
+                        <a:t>[-879, -753]</a:t>
                       </a:r>
                     </a:p>
                   </a:txBody>
@@ -12469,7 +12469,7 @@
                       </a:pPr>
                       <a:r>
                         <a:rPr/>
-                        <a:t>-10,000</a:t>
+                        <a:t>-1,000</a:t>
                       </a:r>
                     </a:p>
                   </a:txBody>
@@ -12484,7 +12484,7 @@
                       </a:pPr>
                       <a:r>
                         <a:rPr/>
-                        <a:t>[-10,723, -9,277]</a:t>
+                        <a:t>[-1,072, -927]</a:t>
                       </a:r>
                     </a:p>
                   </a:txBody>
@@ -13810,10 +13810,10 @@
                 <a:tableStyleId>{5C22544A-7EE6-4342-B048-85BDC9FD1C3A}</a:tableStyleId>
               </a:tblPr>
               <a:tblGrid>
-                <a:gridCol w="2057400"/>
-                <a:gridCol w="2057400"/>
-                <a:gridCol w="2057400"/>
-                <a:gridCol w="2057400"/>
+                <a:gridCol w="2120900"/>
+                <a:gridCol w="1955800"/>
+                <a:gridCol w="1790700"/>
+                <a:gridCol w="2362200"/>
               </a:tblGrid>
               <a:tr h="0">
                 <a:tc>
@@ -15926,8 +15926,8 @@
         </p:blipFill>
         <p:spPr bwMode="auto">
           <a:xfrm>
-            <a:off x="4648200" y="1752600"/>
-            <a:ext cx="4038600" cy="2286000"/>
+            <a:off x="4648200" y="1765300"/>
+            <a:ext cx="4038600" cy="2247900"/>
           </a:xfrm>
           <a:prstGeom prst="rect">
             <a:avLst/>
